--- a/cn_d1_ppt_final.pptx
+++ b/cn_d1_ppt_final.pptx
@@ -2761,13 +2761,13 @@
   <p:clrMapOvr>
     <a:masterClrMapping/>
   </p:clrMapOvr>
-  <mc:AlternateContent xmlns:mc="http://schemas.openxmlformats.org/markup-compatibility/2006">
-    <mc:Choice xmlns:p159="http://schemas.microsoft.com/office/powerpoint/2015/09/main" Requires="p159">
+  <mc:AlternateContent xmlns:mc="http://schemas.openxmlformats.org/markup-compatibility/2006" xmlns:p159="http://schemas.microsoft.com/office/powerpoint/2015/09/main">
+    <mc:Choice Requires="p159">
       <p:transition xmlns:p14="http://schemas.microsoft.com/office/powerpoint/2010/main" spd="slow" p14:dur="2000">
         <p159:morph option="byObject"/>
       </p:transition>
     </mc:Choice>
-    <mc:Fallback>
+    <mc:Fallback xmlns="">
       <p:transition spd="slow">
         <p:fade/>
       </p:transition>
@@ -4040,13 +4040,13 @@
   <p:clrMapOvr>
     <a:masterClrMapping/>
   </p:clrMapOvr>
-  <mc:AlternateContent xmlns:mc="http://schemas.openxmlformats.org/markup-compatibility/2006">
-    <mc:Choice xmlns:p159="http://schemas.microsoft.com/office/powerpoint/2015/09/main" Requires="p159">
+  <mc:AlternateContent xmlns:mc="http://schemas.openxmlformats.org/markup-compatibility/2006" xmlns:p159="http://schemas.microsoft.com/office/powerpoint/2015/09/main">
+    <mc:Choice Requires="p159">
       <p:transition xmlns:p14="http://schemas.microsoft.com/office/powerpoint/2010/main" spd="slow" p14:dur="2000">
         <p159:morph option="byObject"/>
       </p:transition>
     </mc:Choice>
-    <mc:Fallback>
+    <mc:Fallback xmlns="">
       <p:transition spd="slow">
         <p:fade/>
       </p:transition>
@@ -4250,7 +4250,7 @@
                 <a:ea typeface="Calibri" pitchFamily="34" charset="-122"/>
                 <a:cs typeface="Calibri" pitchFamily="34" charset="-120"/>
               </a:rPr>
-              <a:t>1 MB file, 128 × 8 KB chunks</a:t>
+              <a:t>1024 MB file, 1,31,072 × 8 KB chunks</a:t>
             </a:r>
             <a:endParaRPr lang="en-US" sz="1200" dirty="0"/>
           </a:p>
@@ -4552,7 +4552,7 @@
                 <a:ea typeface="Calibri" pitchFamily="34" charset="-122"/>
                 <a:cs typeface="Calibri" pitchFamily="34" charset="-120"/>
               </a:rPr>
-              <a:t>Reported: traffic flowing in 1.3 s</a:t>
+              <a:t>Reported: traffic flowing.</a:t>
             </a:r>
             <a:endParaRPr lang="en-US" sz="1200" dirty="0"/>
           </a:p>
@@ -4573,7 +4573,7 @@
                 <a:ea typeface="Calibri" pitchFamily="34" charset="-122"/>
                 <a:cs typeface="Calibri" pitchFamily="34" charset="-120"/>
               </a:rPr>
-              <a:t>Throughput 612.5 vs 850.3 KB/s</a:t>
+              <a:t>Throughput ~14000 vs ~12500 KB/s</a:t>
             </a:r>
             <a:endParaRPr lang="en-US" sz="1200" dirty="0"/>
           </a:p>
@@ -4594,7 +4594,7 @@
                 <a:ea typeface="Calibri" pitchFamily="34" charset="-122"/>
                 <a:cs typeface="Calibri" pitchFamily="34" charset="-120"/>
               </a:rPr>
-              <a:t>128 of 128 chunks received</a:t>
+              <a:t>All chunks received</a:t>
             </a:r>
             <a:endParaRPr lang="en-US" sz="1200" dirty="0"/>
           </a:p>
@@ -5176,13 +5176,13 @@
   <p:clrMapOvr>
     <a:masterClrMapping/>
   </p:clrMapOvr>
-  <mc:AlternateContent xmlns:mc="http://schemas.openxmlformats.org/markup-compatibility/2006">
-    <mc:Choice xmlns:p159="http://schemas.microsoft.com/office/powerpoint/2015/09/main" Requires="p159">
+  <mc:AlternateContent xmlns:mc="http://schemas.openxmlformats.org/markup-compatibility/2006" xmlns:p159="http://schemas.microsoft.com/office/powerpoint/2015/09/main">
+    <mc:Choice Requires="p159">
       <p:transition xmlns:p14="http://schemas.microsoft.com/office/powerpoint/2010/main" spd="slow" p14:dur="2000">
         <p159:morph option="byObject"/>
       </p:transition>
     </mc:Choice>
-    <mc:Fallback>
+    <mc:Fallback xmlns="">
       <p:transition spd="slow">
         <p:fade/>
       </p:transition>
@@ -5262,13 +5262,13 @@
   <p:clrMapOvr>
     <a:masterClrMapping/>
   </p:clrMapOvr>
-  <mc:AlternateContent xmlns:mc="http://schemas.openxmlformats.org/markup-compatibility/2006">
-    <mc:Choice xmlns:p159="http://schemas.microsoft.com/office/powerpoint/2015/09/main" Requires="p159">
+  <mc:AlternateContent xmlns:mc="http://schemas.openxmlformats.org/markup-compatibility/2006" xmlns:p159="http://schemas.microsoft.com/office/powerpoint/2015/09/main">
+    <mc:Choice Requires="p159">
       <p:transition xmlns:p14="http://schemas.microsoft.com/office/powerpoint/2010/main" spd="slow" p14:dur="2000">
         <p159:morph option="byObject"/>
       </p:transition>
     </mc:Choice>
-    <mc:Fallback>
+    <mc:Fallback xmlns="">
       <p:transition spd="slow">
         <p:fade/>
       </p:transition>
@@ -7079,13 +7079,13 @@
   <p:clrMapOvr>
     <a:masterClrMapping/>
   </p:clrMapOvr>
-  <mc:AlternateContent xmlns:mc="http://schemas.openxmlformats.org/markup-compatibility/2006">
-    <mc:Choice xmlns:p159="http://schemas.microsoft.com/office/powerpoint/2015/09/main" Requires="p159">
+  <mc:AlternateContent xmlns:mc="http://schemas.openxmlformats.org/markup-compatibility/2006" xmlns:p159="http://schemas.microsoft.com/office/powerpoint/2015/09/main">
+    <mc:Choice Requires="p159">
       <p:transition xmlns:p14="http://schemas.microsoft.com/office/powerpoint/2010/main" spd="slow" p14:dur="2000">
         <p159:morph option="byObject"/>
       </p:transition>
     </mc:Choice>
-    <mc:Fallback>
+    <mc:Fallback xmlns="">
       <p:transition spd="slow">
         <p:fade/>
       </p:transition>
@@ -9758,13 +9758,13 @@
   <p:clrMapOvr>
     <a:masterClrMapping/>
   </p:clrMapOvr>
-  <mc:AlternateContent xmlns:mc="http://schemas.openxmlformats.org/markup-compatibility/2006">
-    <mc:Choice xmlns:p159="http://schemas.microsoft.com/office/powerpoint/2015/09/main" Requires="p159">
+  <mc:AlternateContent xmlns:mc="http://schemas.openxmlformats.org/markup-compatibility/2006" xmlns:p159="http://schemas.microsoft.com/office/powerpoint/2015/09/main">
+    <mc:Choice Requires="p159">
       <p:transition xmlns:p14="http://schemas.microsoft.com/office/powerpoint/2010/main" spd="slow" p14:dur="2000">
         <p159:morph option="byObject"/>
       </p:transition>
     </mc:Choice>
-    <mc:Fallback>
+    <mc:Fallback xmlns="">
       <p:transition spd="slow">
         <p:fade/>
       </p:transition>
@@ -10470,13 +10470,13 @@
   <p:clrMapOvr>
     <a:masterClrMapping/>
   </p:clrMapOvr>
-  <mc:AlternateContent xmlns:mc="http://schemas.openxmlformats.org/markup-compatibility/2006">
-    <mc:Choice xmlns:p159="http://schemas.microsoft.com/office/powerpoint/2015/09/main" Requires="p159">
+  <mc:AlternateContent xmlns:mc="http://schemas.openxmlformats.org/markup-compatibility/2006" xmlns:p159="http://schemas.microsoft.com/office/powerpoint/2015/09/main">
+    <mc:Choice Requires="p159">
       <p:transition xmlns:p14="http://schemas.microsoft.com/office/powerpoint/2010/main" spd="slow" p14:dur="2000">
         <p159:morph option="byObject"/>
       </p:transition>
     </mc:Choice>
-    <mc:Fallback>
+    <mc:Fallback xmlns="">
       <p:transition spd="slow">
         <p:fade/>
       </p:transition>
@@ -11873,13 +11873,13 @@
   <p:clrMapOvr>
     <a:masterClrMapping/>
   </p:clrMapOvr>
-  <mc:AlternateContent xmlns:mc="http://schemas.openxmlformats.org/markup-compatibility/2006">
-    <mc:Choice xmlns:p159="http://schemas.microsoft.com/office/powerpoint/2015/09/main" Requires="p159">
+  <mc:AlternateContent xmlns:mc="http://schemas.openxmlformats.org/markup-compatibility/2006" xmlns:p159="http://schemas.microsoft.com/office/powerpoint/2015/09/main">
+    <mc:Choice Requires="p159">
       <p:transition xmlns:p14="http://schemas.microsoft.com/office/powerpoint/2010/main" spd="slow" p14:dur="2000">
         <p159:morph option="byObject"/>
       </p:transition>
     </mc:Choice>
-    <mc:Fallback>
+    <mc:Fallback xmlns="">
       <p:transition spd="slow">
         <p:fade/>
       </p:transition>
@@ -12753,13 +12753,13 @@
   <p:clrMapOvr>
     <a:masterClrMapping/>
   </p:clrMapOvr>
-  <mc:AlternateContent xmlns:mc="http://schemas.openxmlformats.org/markup-compatibility/2006">
-    <mc:Choice xmlns:p159="http://schemas.microsoft.com/office/powerpoint/2015/09/main" Requires="p159">
+  <mc:AlternateContent xmlns:mc="http://schemas.openxmlformats.org/markup-compatibility/2006" xmlns:p159="http://schemas.microsoft.com/office/powerpoint/2015/09/main">
+    <mc:Choice Requires="p159">
       <p:transition xmlns:p14="http://schemas.microsoft.com/office/powerpoint/2010/main" spd="slow" p14:dur="2000">
         <p159:morph option="byObject"/>
       </p:transition>
     </mc:Choice>
-    <mc:Fallback>
+    <mc:Fallback xmlns="">
       <p:transition spd="slow">
         <p:fade/>
       </p:transition>
@@ -13843,13 +13843,13 @@
   <p:clrMapOvr>
     <a:masterClrMapping/>
   </p:clrMapOvr>
-  <mc:AlternateContent xmlns:mc="http://schemas.openxmlformats.org/markup-compatibility/2006">
-    <mc:Choice xmlns:p159="http://schemas.microsoft.com/office/powerpoint/2015/09/main" Requires="p159">
+  <mc:AlternateContent xmlns:mc="http://schemas.openxmlformats.org/markup-compatibility/2006" xmlns:p159="http://schemas.microsoft.com/office/powerpoint/2015/09/main">
+    <mc:Choice Requires="p159">
       <p:transition xmlns:p14="http://schemas.microsoft.com/office/powerpoint/2010/main" spd="slow" p14:dur="2000">
         <p159:morph option="byObject"/>
       </p:transition>
     </mc:Choice>
-    <mc:Fallback>
+    <mc:Fallback xmlns="">
       <p:transition spd="slow">
         <p:fade/>
       </p:transition>
@@ -13929,13 +13929,13 @@
   <p:clrMapOvr>
     <a:masterClrMapping/>
   </p:clrMapOvr>
-  <mc:AlternateContent xmlns:mc="http://schemas.openxmlformats.org/markup-compatibility/2006">
-    <mc:Choice xmlns:p159="http://schemas.microsoft.com/office/powerpoint/2015/09/main" Requires="p159">
+  <mc:AlternateContent xmlns:mc="http://schemas.openxmlformats.org/markup-compatibility/2006" xmlns:p159="http://schemas.microsoft.com/office/powerpoint/2015/09/main">
+    <mc:Choice Requires="p159">
       <p:transition xmlns:p14="http://schemas.microsoft.com/office/powerpoint/2010/main" spd="slow" p14:dur="2000">
         <p159:morph option="byObject"/>
       </p:transition>
     </mc:Choice>
-    <mc:Fallback>
+    <mc:Fallback xmlns="">
       <p:transition spd="slow">
         <p:fade/>
       </p:transition>
@@ -14677,7 +14677,7 @@
                 <a:ea typeface="Calibri" pitchFamily="34" charset="-122"/>
                 <a:cs typeface="Calibri" pitchFamily="34" charset="-120"/>
               </a:rPr>
-              <a:t>1 MB file</a:t>
+              <a:t>1024 MB file</a:t>
             </a:r>
             <a:endParaRPr lang="en-US" sz="1100" dirty="0"/>
           </a:p>
@@ -14694,7 +14694,7 @@
                 <a:ea typeface="Calibri" pitchFamily="34" charset="-122"/>
                 <a:cs typeface="Calibri" pitchFamily="34" charset="-120"/>
               </a:rPr>
-              <a:t>128 × 8 KB chunks</a:t>
+              <a:t>1,31,072 × 8 KB chunks</a:t>
             </a:r>
             <a:endParaRPr lang="en-US" sz="1100" dirty="0"/>
           </a:p>
@@ -15565,13 +15565,13 @@
   <p:clrMapOvr>
     <a:masterClrMapping/>
   </p:clrMapOvr>
-  <mc:AlternateContent xmlns:mc="http://schemas.openxmlformats.org/markup-compatibility/2006">
-    <mc:Choice xmlns:p159="http://schemas.microsoft.com/office/powerpoint/2015/09/main" Requires="p159">
+  <mc:AlternateContent xmlns:mc="http://schemas.openxmlformats.org/markup-compatibility/2006" xmlns:p159="http://schemas.microsoft.com/office/powerpoint/2015/09/main">
+    <mc:Choice Requires="p159">
       <p:transition xmlns:p14="http://schemas.microsoft.com/office/powerpoint/2010/main" spd="slow" p14:dur="2000">
         <p159:morph option="byObject"/>
       </p:transition>
     </mc:Choice>
-    <mc:Fallback>
+    <mc:Fallback xmlns="">
       <p:transition spd="slow">
         <p:fade/>
       </p:transition>
@@ -15651,13 +15651,13 @@
   <p:clrMapOvr>
     <a:masterClrMapping/>
   </p:clrMapOvr>
-  <mc:AlternateContent xmlns:mc="http://schemas.openxmlformats.org/markup-compatibility/2006">
-    <mc:Choice xmlns:p159="http://schemas.microsoft.com/office/powerpoint/2015/09/main" Requires="p159">
+  <mc:AlternateContent xmlns:mc="http://schemas.openxmlformats.org/markup-compatibility/2006" xmlns:p159="http://schemas.microsoft.com/office/powerpoint/2015/09/main">
+    <mc:Choice Requires="p159">
       <p:transition xmlns:p14="http://schemas.microsoft.com/office/powerpoint/2010/main" spd="slow" p14:dur="2000">
         <p159:morph option="byObject"/>
       </p:transition>
     </mc:Choice>
-    <mc:Fallback>
+    <mc:Fallback xmlns="">
       <p:transition spd="slow">
         <p:fade/>
       </p:transition>
@@ -16224,13 +16224,13 @@
   <p:clrMapOvr>
     <a:masterClrMapping/>
   </p:clrMapOvr>
-  <mc:AlternateContent xmlns:mc="http://schemas.openxmlformats.org/markup-compatibility/2006">
-    <mc:Choice xmlns:p159="http://schemas.microsoft.com/office/powerpoint/2015/09/main" Requires="p159">
+  <mc:AlternateContent xmlns:mc="http://schemas.openxmlformats.org/markup-compatibility/2006" xmlns:p159="http://schemas.microsoft.com/office/powerpoint/2015/09/main">
+    <mc:Choice Requires="p159">
       <p:transition xmlns:p14="http://schemas.microsoft.com/office/powerpoint/2010/main" spd="slow" p14:dur="2000">
         <p159:morph option="byObject"/>
       </p:transition>
     </mc:Choice>
-    <mc:Fallback>
+    <mc:Fallback xmlns="">
       <p:transition spd="slow">
         <p:fade/>
       </p:transition>
@@ -18190,13 +18190,13 @@
   <p:clrMapOvr>
     <a:masterClrMapping/>
   </p:clrMapOvr>
-  <mc:AlternateContent xmlns:mc="http://schemas.openxmlformats.org/markup-compatibility/2006">
-    <mc:Choice xmlns:p159="http://schemas.microsoft.com/office/powerpoint/2015/09/main" Requires="p159">
+  <mc:AlternateContent xmlns:mc="http://schemas.openxmlformats.org/markup-compatibility/2006" xmlns:p159="http://schemas.microsoft.com/office/powerpoint/2015/09/main">
+    <mc:Choice Requires="p159">
       <p:transition xmlns:p14="http://schemas.microsoft.com/office/powerpoint/2010/main" spd="slow" p14:dur="2000">
         <p159:morph option="byObject"/>
       </p:transition>
     </mc:Choice>
-    <mc:Fallback>
+    <mc:Fallback xmlns="">
       <p:transition spd="slow">
         <p:fade/>
       </p:transition>

--- a/cn_d1_ppt_final.pptx
+++ b/cn_d1_ppt_final.pptx
@@ -2761,13 +2761,13 @@
   <p:clrMapOvr>
     <a:masterClrMapping/>
   </p:clrMapOvr>
-  <mc:AlternateContent xmlns:mc="http://schemas.openxmlformats.org/markup-compatibility/2006" xmlns:p159="http://schemas.microsoft.com/office/powerpoint/2015/09/main">
-    <mc:Choice Requires="p159">
+  <mc:AlternateContent xmlns:mc="http://schemas.openxmlformats.org/markup-compatibility/2006">
+    <mc:Choice xmlns:p159="http://schemas.microsoft.com/office/powerpoint/2015/09/main" Requires="p159">
       <p:transition xmlns:p14="http://schemas.microsoft.com/office/powerpoint/2010/main" spd="slow" p14:dur="2000">
         <p159:morph option="byObject"/>
       </p:transition>
     </mc:Choice>
-    <mc:Fallback xmlns="">
+    <mc:Fallback>
       <p:transition spd="slow">
         <p:fade/>
       </p:transition>
@@ -4040,13 +4040,13 @@
   <p:clrMapOvr>
     <a:masterClrMapping/>
   </p:clrMapOvr>
-  <mc:AlternateContent xmlns:mc="http://schemas.openxmlformats.org/markup-compatibility/2006" xmlns:p159="http://schemas.microsoft.com/office/powerpoint/2015/09/main">
-    <mc:Choice Requires="p159">
+  <mc:AlternateContent xmlns:mc="http://schemas.openxmlformats.org/markup-compatibility/2006">
+    <mc:Choice xmlns:p159="http://schemas.microsoft.com/office/powerpoint/2015/09/main" Requires="p159">
       <p:transition xmlns:p14="http://schemas.microsoft.com/office/powerpoint/2010/main" spd="slow" p14:dur="2000">
         <p159:morph option="byObject"/>
       </p:transition>
     </mc:Choice>
-    <mc:Fallback xmlns="">
+    <mc:Fallback>
       <p:transition spd="slow">
         <p:fade/>
       </p:transition>
@@ -4250,7 +4250,7 @@
                 <a:ea typeface="Calibri" pitchFamily="34" charset="-122"/>
                 <a:cs typeface="Calibri" pitchFamily="34" charset="-120"/>
               </a:rPr>
-              <a:t>1024 MB file, 1,31,072 × 8 KB chunks</a:t>
+              <a:t>1 MB file, 128 × 8 KB chunks</a:t>
             </a:r>
             <a:endParaRPr lang="en-US" sz="1200" dirty="0"/>
           </a:p>
@@ -4552,7 +4552,7 @@
                 <a:ea typeface="Calibri" pitchFamily="34" charset="-122"/>
                 <a:cs typeface="Calibri" pitchFamily="34" charset="-120"/>
               </a:rPr>
-              <a:t>Reported: traffic flowing.</a:t>
+              <a:t>Reported: traffic flowing in 1.3 s</a:t>
             </a:r>
             <a:endParaRPr lang="en-US" sz="1200" dirty="0"/>
           </a:p>
@@ -4573,7 +4573,7 @@
                 <a:ea typeface="Calibri" pitchFamily="34" charset="-122"/>
                 <a:cs typeface="Calibri" pitchFamily="34" charset="-120"/>
               </a:rPr>
-              <a:t>Throughput ~14000 vs ~12500 KB/s</a:t>
+              <a:t>Throughput 612.5 vs 850.3 KB/s</a:t>
             </a:r>
             <a:endParaRPr lang="en-US" sz="1200" dirty="0"/>
           </a:p>
@@ -4594,7 +4594,7 @@
                 <a:ea typeface="Calibri" pitchFamily="34" charset="-122"/>
                 <a:cs typeface="Calibri" pitchFamily="34" charset="-120"/>
               </a:rPr>
-              <a:t>All chunks received</a:t>
+              <a:t>128 of 128 chunks received</a:t>
             </a:r>
             <a:endParaRPr lang="en-US" sz="1200" dirty="0"/>
           </a:p>
@@ -5176,13 +5176,13 @@
   <p:clrMapOvr>
     <a:masterClrMapping/>
   </p:clrMapOvr>
-  <mc:AlternateContent xmlns:mc="http://schemas.openxmlformats.org/markup-compatibility/2006" xmlns:p159="http://schemas.microsoft.com/office/powerpoint/2015/09/main">
-    <mc:Choice Requires="p159">
+  <mc:AlternateContent xmlns:mc="http://schemas.openxmlformats.org/markup-compatibility/2006">
+    <mc:Choice xmlns:p159="http://schemas.microsoft.com/office/powerpoint/2015/09/main" Requires="p159">
       <p:transition xmlns:p14="http://schemas.microsoft.com/office/powerpoint/2010/main" spd="slow" p14:dur="2000">
         <p159:morph option="byObject"/>
       </p:transition>
     </mc:Choice>
-    <mc:Fallback xmlns="">
+    <mc:Fallback>
       <p:transition spd="slow">
         <p:fade/>
       </p:transition>
@@ -5262,13 +5262,13 @@
   <p:clrMapOvr>
     <a:masterClrMapping/>
   </p:clrMapOvr>
-  <mc:AlternateContent xmlns:mc="http://schemas.openxmlformats.org/markup-compatibility/2006" xmlns:p159="http://schemas.microsoft.com/office/powerpoint/2015/09/main">
-    <mc:Choice Requires="p159">
+  <mc:AlternateContent xmlns:mc="http://schemas.openxmlformats.org/markup-compatibility/2006">
+    <mc:Choice xmlns:p159="http://schemas.microsoft.com/office/powerpoint/2015/09/main" Requires="p159">
       <p:transition xmlns:p14="http://schemas.microsoft.com/office/powerpoint/2010/main" spd="slow" p14:dur="2000">
         <p159:morph option="byObject"/>
       </p:transition>
     </mc:Choice>
-    <mc:Fallback xmlns="">
+    <mc:Fallback>
       <p:transition spd="slow">
         <p:fade/>
       </p:transition>
@@ -7079,13 +7079,13 @@
   <p:clrMapOvr>
     <a:masterClrMapping/>
   </p:clrMapOvr>
-  <mc:AlternateContent xmlns:mc="http://schemas.openxmlformats.org/markup-compatibility/2006" xmlns:p159="http://schemas.microsoft.com/office/powerpoint/2015/09/main">
-    <mc:Choice Requires="p159">
+  <mc:AlternateContent xmlns:mc="http://schemas.openxmlformats.org/markup-compatibility/2006">
+    <mc:Choice xmlns:p159="http://schemas.microsoft.com/office/powerpoint/2015/09/main" Requires="p159">
       <p:transition xmlns:p14="http://schemas.microsoft.com/office/powerpoint/2010/main" spd="slow" p14:dur="2000">
         <p159:morph option="byObject"/>
       </p:transition>
     </mc:Choice>
-    <mc:Fallback xmlns="">
+    <mc:Fallback>
       <p:transition spd="slow">
         <p:fade/>
       </p:transition>
@@ -9758,13 +9758,13 @@
   <p:clrMapOvr>
     <a:masterClrMapping/>
   </p:clrMapOvr>
-  <mc:AlternateContent xmlns:mc="http://schemas.openxmlformats.org/markup-compatibility/2006" xmlns:p159="http://schemas.microsoft.com/office/powerpoint/2015/09/main">
-    <mc:Choice Requires="p159">
+  <mc:AlternateContent xmlns:mc="http://schemas.openxmlformats.org/markup-compatibility/2006">
+    <mc:Choice xmlns:p159="http://schemas.microsoft.com/office/powerpoint/2015/09/main" Requires="p159">
       <p:transition xmlns:p14="http://schemas.microsoft.com/office/powerpoint/2010/main" spd="slow" p14:dur="2000">
         <p159:morph option="byObject"/>
       </p:transition>
     </mc:Choice>
-    <mc:Fallback xmlns="">
+    <mc:Fallback>
       <p:transition spd="slow">
         <p:fade/>
       </p:transition>
@@ -10470,13 +10470,13 @@
   <p:clrMapOvr>
     <a:masterClrMapping/>
   </p:clrMapOvr>
-  <mc:AlternateContent xmlns:mc="http://schemas.openxmlformats.org/markup-compatibility/2006" xmlns:p159="http://schemas.microsoft.com/office/powerpoint/2015/09/main">
-    <mc:Choice Requires="p159">
+  <mc:AlternateContent xmlns:mc="http://schemas.openxmlformats.org/markup-compatibility/2006">
+    <mc:Choice xmlns:p159="http://schemas.microsoft.com/office/powerpoint/2015/09/main" Requires="p159">
       <p:transition xmlns:p14="http://schemas.microsoft.com/office/powerpoint/2010/main" spd="slow" p14:dur="2000">
         <p159:morph option="byObject"/>
       </p:transition>
     </mc:Choice>
-    <mc:Fallback xmlns="">
+    <mc:Fallback>
       <p:transition spd="slow">
         <p:fade/>
       </p:transition>
@@ -11873,13 +11873,13 @@
   <p:clrMapOvr>
     <a:masterClrMapping/>
   </p:clrMapOvr>
-  <mc:AlternateContent xmlns:mc="http://schemas.openxmlformats.org/markup-compatibility/2006" xmlns:p159="http://schemas.microsoft.com/office/powerpoint/2015/09/main">
-    <mc:Choice Requires="p159">
+  <mc:AlternateContent xmlns:mc="http://schemas.openxmlformats.org/markup-compatibility/2006">
+    <mc:Choice xmlns:p159="http://schemas.microsoft.com/office/powerpoint/2015/09/main" Requires="p159">
       <p:transition xmlns:p14="http://schemas.microsoft.com/office/powerpoint/2010/main" spd="slow" p14:dur="2000">
         <p159:morph option="byObject"/>
       </p:transition>
     </mc:Choice>
-    <mc:Fallback xmlns="">
+    <mc:Fallback>
       <p:transition spd="slow">
         <p:fade/>
       </p:transition>
@@ -12753,13 +12753,13 @@
   <p:clrMapOvr>
     <a:masterClrMapping/>
   </p:clrMapOvr>
-  <mc:AlternateContent xmlns:mc="http://schemas.openxmlformats.org/markup-compatibility/2006" xmlns:p159="http://schemas.microsoft.com/office/powerpoint/2015/09/main">
-    <mc:Choice Requires="p159">
+  <mc:AlternateContent xmlns:mc="http://schemas.openxmlformats.org/markup-compatibility/2006">
+    <mc:Choice xmlns:p159="http://schemas.microsoft.com/office/powerpoint/2015/09/main" Requires="p159">
       <p:transition xmlns:p14="http://schemas.microsoft.com/office/powerpoint/2010/main" spd="slow" p14:dur="2000">
         <p159:morph option="byObject"/>
       </p:transition>
     </mc:Choice>
-    <mc:Fallback xmlns="">
+    <mc:Fallback>
       <p:transition spd="slow">
         <p:fade/>
       </p:transition>
@@ -13843,13 +13843,13 @@
   <p:clrMapOvr>
     <a:masterClrMapping/>
   </p:clrMapOvr>
-  <mc:AlternateContent xmlns:mc="http://schemas.openxmlformats.org/markup-compatibility/2006" xmlns:p159="http://schemas.microsoft.com/office/powerpoint/2015/09/main">
-    <mc:Choice Requires="p159">
+  <mc:AlternateContent xmlns:mc="http://schemas.openxmlformats.org/markup-compatibility/2006">
+    <mc:Choice xmlns:p159="http://schemas.microsoft.com/office/powerpoint/2015/09/main" Requires="p159">
       <p:transition xmlns:p14="http://schemas.microsoft.com/office/powerpoint/2010/main" spd="slow" p14:dur="2000">
         <p159:morph option="byObject"/>
       </p:transition>
     </mc:Choice>
-    <mc:Fallback xmlns="">
+    <mc:Fallback>
       <p:transition spd="slow">
         <p:fade/>
       </p:transition>
@@ -13929,13 +13929,13 @@
   <p:clrMapOvr>
     <a:masterClrMapping/>
   </p:clrMapOvr>
-  <mc:AlternateContent xmlns:mc="http://schemas.openxmlformats.org/markup-compatibility/2006" xmlns:p159="http://schemas.microsoft.com/office/powerpoint/2015/09/main">
-    <mc:Choice Requires="p159">
+  <mc:AlternateContent xmlns:mc="http://schemas.openxmlformats.org/markup-compatibility/2006">
+    <mc:Choice xmlns:p159="http://schemas.microsoft.com/office/powerpoint/2015/09/main" Requires="p159">
       <p:transition xmlns:p14="http://schemas.microsoft.com/office/powerpoint/2010/main" spd="slow" p14:dur="2000">
         <p159:morph option="byObject"/>
       </p:transition>
     </mc:Choice>
-    <mc:Fallback xmlns="">
+    <mc:Fallback>
       <p:transition spd="slow">
         <p:fade/>
       </p:transition>
@@ -14677,7 +14677,7 @@
                 <a:ea typeface="Calibri" pitchFamily="34" charset="-122"/>
                 <a:cs typeface="Calibri" pitchFamily="34" charset="-120"/>
               </a:rPr>
-              <a:t>1024 MB file</a:t>
+              <a:t>1 MB file</a:t>
             </a:r>
             <a:endParaRPr lang="en-US" sz="1100" dirty="0"/>
           </a:p>
@@ -14694,7 +14694,7 @@
                 <a:ea typeface="Calibri" pitchFamily="34" charset="-122"/>
                 <a:cs typeface="Calibri" pitchFamily="34" charset="-120"/>
               </a:rPr>
-              <a:t>1,31,072 × 8 KB chunks</a:t>
+              <a:t>128 × 8 KB chunks</a:t>
             </a:r>
             <a:endParaRPr lang="en-US" sz="1100" dirty="0"/>
           </a:p>
@@ -15565,13 +15565,13 @@
   <p:clrMapOvr>
     <a:masterClrMapping/>
   </p:clrMapOvr>
-  <mc:AlternateContent xmlns:mc="http://schemas.openxmlformats.org/markup-compatibility/2006" xmlns:p159="http://schemas.microsoft.com/office/powerpoint/2015/09/main">
-    <mc:Choice Requires="p159">
+  <mc:AlternateContent xmlns:mc="http://schemas.openxmlformats.org/markup-compatibility/2006">
+    <mc:Choice xmlns:p159="http://schemas.microsoft.com/office/powerpoint/2015/09/main" Requires="p159">
       <p:transition xmlns:p14="http://schemas.microsoft.com/office/powerpoint/2010/main" spd="slow" p14:dur="2000">
         <p159:morph option="byObject"/>
       </p:transition>
     </mc:Choice>
-    <mc:Fallback xmlns="">
+    <mc:Fallback>
       <p:transition spd="slow">
         <p:fade/>
       </p:transition>
@@ -15651,13 +15651,13 @@
   <p:clrMapOvr>
     <a:masterClrMapping/>
   </p:clrMapOvr>
-  <mc:AlternateContent xmlns:mc="http://schemas.openxmlformats.org/markup-compatibility/2006" xmlns:p159="http://schemas.microsoft.com/office/powerpoint/2015/09/main">
-    <mc:Choice Requires="p159">
+  <mc:AlternateContent xmlns:mc="http://schemas.openxmlformats.org/markup-compatibility/2006">
+    <mc:Choice xmlns:p159="http://schemas.microsoft.com/office/powerpoint/2015/09/main" Requires="p159">
       <p:transition xmlns:p14="http://schemas.microsoft.com/office/powerpoint/2010/main" spd="slow" p14:dur="2000">
         <p159:morph option="byObject"/>
       </p:transition>
     </mc:Choice>
-    <mc:Fallback xmlns="">
+    <mc:Fallback>
       <p:transition spd="slow">
         <p:fade/>
       </p:transition>
@@ -16224,13 +16224,13 @@
   <p:clrMapOvr>
     <a:masterClrMapping/>
   </p:clrMapOvr>
-  <mc:AlternateContent xmlns:mc="http://schemas.openxmlformats.org/markup-compatibility/2006" xmlns:p159="http://schemas.microsoft.com/office/powerpoint/2015/09/main">
-    <mc:Choice Requires="p159">
+  <mc:AlternateContent xmlns:mc="http://schemas.openxmlformats.org/markup-compatibility/2006">
+    <mc:Choice xmlns:p159="http://schemas.microsoft.com/office/powerpoint/2015/09/main" Requires="p159">
       <p:transition xmlns:p14="http://schemas.microsoft.com/office/powerpoint/2010/main" spd="slow" p14:dur="2000">
         <p159:morph option="byObject"/>
       </p:transition>
     </mc:Choice>
-    <mc:Fallback xmlns="">
+    <mc:Fallback>
       <p:transition spd="slow">
         <p:fade/>
       </p:transition>
@@ -18190,13 +18190,13 @@
   <p:clrMapOvr>
     <a:masterClrMapping/>
   </p:clrMapOvr>
-  <mc:AlternateContent xmlns:mc="http://schemas.openxmlformats.org/markup-compatibility/2006" xmlns:p159="http://schemas.microsoft.com/office/powerpoint/2015/09/main">
-    <mc:Choice Requires="p159">
+  <mc:AlternateContent xmlns:mc="http://schemas.openxmlformats.org/markup-compatibility/2006">
+    <mc:Choice xmlns:p159="http://schemas.microsoft.com/office/powerpoint/2015/09/main" Requires="p159">
       <p:transition xmlns:p14="http://schemas.microsoft.com/office/powerpoint/2010/main" spd="slow" p14:dur="2000">
         <p159:morph option="byObject"/>
       </p:transition>
     </mc:Choice>
-    <mc:Fallback xmlns="">
+    <mc:Fallback>
       <p:transition spd="slow">
         <p:fade/>
       </p:transition>
